--- a/domain-seminars/week02_revenue_cycle_basics.pptx
+++ b/domain-seminars/week02_revenue_cycle_basics.pptx
@@ -506,7 +506,7 @@
           <a:lstStyle/>
           <a:p>
             <a:r>
-              <a:t>Domain seminar for week 2: Revenue Cycle Basics. It follows the course pattern: basics and terminology, where the topic sits in industry and policy, reform goals, how analytics is deployed, and how analytics drives decisions. Replace this note with your own opening remarks.</a:t>
+              <a:t>Domain seminar for week 2: Revenue Cycle Basics. We will go through basics and terminology, where the topic is found across industry and policy, reform goals, how analytics is deployed, and how analytics drives decisions. Provide opening remarks here.</a:t>
             </a:r>
           </a:p>
         </p:txBody>

--- a/domain-seminars/week02_revenue_cycle_basics.pptx
+++ b/domain-seminars/week02_revenue_cycle_basics.pptx
@@ -11,6 +11,7 @@
     <p:sldId id="269" r:id="rId20"/>
     <p:sldId id="270" r:id="rId21"/>
     <p:sldId id="271" r:id="rId22"/>
+    <p:sldId id="272" r:id="rId11"/>
   </p:sldIdLst>
   <p:notesMasterIdLst>
     <p:notesMasterId r:id="rId12"/>
@@ -857,6 +858,76 @@
           <a:p>
             <a:r>
               <a:t>A CFO's first questions are usually how much each payer paid and who pays slowest. Use medians as well as means, because payment timing is skewed by a few very slow claims. Exclude claims that haven't been adjudicated yet, or the averages will be distorted. A payer that is consistently slow is a contract conversation, not just a collections problem.</a:t>
+            </a:r>
+          </a:p>
+        </p:txBody>
+      </p:sp>
+      <p:sp>
+        <p:nvSpPr>
+          <p:cNvPr id="4" name="Slide Number Placeholder 3"/>
+          <p:cNvSpPr>
+            <a:spLocks noGrp="1"/>
+          </p:cNvSpPr>
+          <p:nvPr>
+            <p:ph type="sldNum" idx="5" sz="quarter"/>
+          </p:nvPr>
+        </p:nvSpPr>
+        <p:spPr/>
+      </p:sp>
+    </p:spTree>
+  </p:cSld>
+  <p:clrMapOvr>
+    <a:masterClrMapping/>
+  </p:clrMapOvr>
+</p:notes>
+</file>
+
+<file path=ppt/notesSlides/notesSlide7.xml><?xml version="1.0" encoding="utf-8"?>
+<p:notes xmlns:a="http://schemas.openxmlformats.org/drawingml/2006/main" xmlns:p="http://schemas.openxmlformats.org/presentationml/2006/main" xmlns:r="http://schemas.openxmlformats.org/officeDocument/2006/relationships">
+  <p:cSld>
+    <p:spTree>
+      <p:nvGrpSpPr>
+        <p:cNvPr id="1" name=""/>
+        <p:cNvGrpSpPr/>
+        <p:nvPr/>
+      </p:nvGrpSpPr>
+      <p:grpSpPr>
+        <a:xfrm>
+          <a:off x="0" y="0"/>
+          <a:ext cx="0" cy="0"/>
+          <a:chOff x="0" y="0"/>
+          <a:chExt cx="0" cy="0"/>
+        </a:xfrm>
+      </p:grpSpPr>
+      <p:sp>
+        <p:nvSpPr>
+          <p:cNvPr id="2" name="Slide Image Placeholder 1"/>
+          <p:cNvSpPr>
+            <a:spLocks noGrp="1"/>
+          </p:cNvSpPr>
+          <p:nvPr>
+            <p:ph type="sldImg" idx="2"/>
+          </p:nvPr>
+        </p:nvSpPr>
+        <p:spPr/>
+      </p:sp>
+      <p:sp>
+        <p:nvSpPr>
+          <p:cNvPr id="3" name="Notes Placeholder 2"/>
+          <p:cNvSpPr>
+            <a:spLocks noGrp="1"/>
+          </p:cNvSpPr>
+          <p:nvPr>
+            <p:ph type="body" idx="3" sz="quarter"/>
+          </p:nvPr>
+        </p:nvSpPr>
+        <p:spPr/>
+        <p:txBody>
+          <a:bodyPr/>
+          <a:lstStyle/>
+          <a:p>
+            <a:r>
+              <a:t>Give students a few minutes to write an answer drawn from their own experience and career, then ask two or three to share. Connect their examples back to this seminar's content. In an online section, post the same question to the discussion board.</a:t>
             </a:r>
           </a:p>
         </p:txBody>
@@ -2572,6 +2643,167 @@
             <a:fld id="{F7021451-1387-4CA6-816F-3879F97B5CBC}" type="slidenum">
               <a:rPr b="0" lang="en-US"/>
               <a:t>6</a:t>
+            </a:fld>
+            <a:endParaRPr lang="en-US"/>
+          </a:p>
+        </p:txBody>
+      </p:sp>
+    </p:spTree>
+  </p:cSld>
+  <p:clrMapOvr>
+    <a:masterClrMapping/>
+  </p:clrMapOvr>
+</p:sld>
+</file>
+
+<file path=ppt/slides/slide7.xml><?xml version="1.0" encoding="utf-8"?>
+<p:sld xmlns:a="http://schemas.openxmlformats.org/drawingml/2006/main" xmlns:p="http://schemas.openxmlformats.org/presentationml/2006/main" xmlns:r="http://schemas.openxmlformats.org/officeDocument/2006/relationships">
+  <p:cSld>
+    <p:spTree>
+      <p:nvGrpSpPr>
+        <p:cNvPr id="1" name=""/>
+        <p:cNvGrpSpPr/>
+        <p:nvPr/>
+      </p:nvGrpSpPr>
+      <p:grpSpPr/>
+      <p:sp>
+        <p:nvSpPr>
+          <p:cNvPr id="2" name="Text 0"/>
+          <p:cNvSpPr/>
+          <p:nvPr>
+            <p:ph idx="100" type="title" hasCustomPrompt="1"/>
+          </p:nvPr>
+        </p:nvSpPr>
+        <p:spPr>
+          <a:xfrm>
+            <a:off x="731520" y="457200"/>
+            <a:ext cx="10698480" cy="822960"/>
+          </a:xfrm>
+          <a:prstGeom prst="rect">
+            <a:avLst/>
+          </a:prstGeom>
+          <a:noFill/>
+          <a:ln/>
+        </p:spPr>
+        <p:txBody>
+          <a:bodyPr wrap="square" lIns="0" tIns="0" rIns="0" bIns="0" rtlCol="0" anchor="t"/>
+          <a:lstStyle/>
+          <a:p>
+            <a:pPr algn="l" indent="0" marL="0">
+              <a:buNone/>
+            </a:pPr>
+            <a:r>
+              <a:rPr lang="en-US" sz="3200" b="1" dirty="0">
+                <a:solidFill>
+                  <a:srgbClr val="FFFFFF"/>
+                </a:solidFill>
+              </a:rPr>
+              <a:t>Discussion</a:t>
+            </a:r>
+            <a:endParaRPr lang="en-US" sz="3200" dirty="0"/>
+          </a:p>
+        </p:txBody>
+      </p:sp>
+      <p:sp>
+        <p:nvSpPr>
+          <p:cNvPr id="3" name="Text 0"/>
+          <p:cNvSpPr/>
+          <p:nvPr>
+            <p:ph idx="101" type="body" hasCustomPrompt="1"/>
+          </p:nvPr>
+        </p:nvSpPr>
+        <p:spPr>
+          <a:xfrm>
+            <a:off x="731520" y="1554480"/>
+            <a:ext cx="10698480" cy="4754880"/>
+          </a:xfrm>
+          <a:prstGeom prst="rect">
+            <a:avLst/>
+          </a:prstGeom>
+          <a:noFill/>
+          <a:ln/>
+        </p:spPr>
+        <p:txBody>
+          <a:bodyPr wrap="square" rtlCol="0" anchor="t"/>
+          <a:lstStyle/>
+          <a:p>
+            <a:pPr algn="l" marL="342900" indent="-342900">
+              <a:spcAft>
+                <a:spcPts val="1000"/>
+              </a:spcAft>
+              <a:buSzPct val="100000"/>
+              <a:buChar char="•"/>
+            </a:pPr>
+            <a:r>
+              <a:rPr lang="en-US" sz="2400" dirty="0">
+                <a:solidFill>
+                  <a:srgbClr val="FFFFFF"/>
+                </a:solidFill>
+              </a:rPr>
+              <a:t>Where in your organization does money get delayed or lost between the charge and the payment, and what would you measure to find out why?</a:t>
+            </a:r>
+            <a:endParaRPr lang="en-US" sz="2400" dirty="0"/>
+          </a:p>
+          <a:p>
+            <a:pPr algn="l" marL="342900" indent="-342900">
+              <a:spcAft>
+                <a:spcPts val="1000"/>
+              </a:spcAft>
+              <a:buSzPct val="100000"/>
+              <a:buChar char="•"/>
+            </a:pPr>
+            <a:r>
+              <a:rPr lang="en-US" sz="2400" dirty="0">
+                <a:solidFill>
+                  <a:srgbClr val="FFFFFF"/>
+                </a:solidFill>
+              </a:rPr>
+              <a:t>Draw on your own experience and career, and apply today's seminar to that setting.</a:t>
+            </a:r>
+            <a:endParaRPr lang="en-US" sz="2400" dirty="0"/>
+          </a:p>
+        </p:txBody>
+      </p:sp>
+      <p:sp>
+        <p:nvSpPr>
+          <p:cNvPr id="25" name="Slide Number Placeholder 0"/>
+          <p:cNvSpPr>
+            <a:spLocks noGrp="1"/>
+          </p:cNvSpPr>
+          <p:nvPr>
+            <p:ph type="sldNum" sz="quarter" idx="4294967295"/>
+          </p:nvPr>
+        </p:nvSpPr>
+        <p:spPr>
+          <a:xfrm>
+            <a:off x="10972800" y="6400800"/>
+            <a:ext cx="548640" cy="274320"/>
+          </a:xfrm>
+          <a:prstGeom prst="rect">
+            <a:avLst/>
+          </a:prstGeom>
+          <a:extLst>
+            <a:ext uri="{C572A759-6A51-4108-AA02-DFA0A04FC94B}">
+              <ma14:wrappingTextBoxFlag xmlns:ma14="http://schemas.microsoft.com/office/mac/drawingml/2011/main" val="0"/>
+            </a:ext>
+          </a:extLst>
+        </p:spPr>
+        <p:txBody>
+          <a:bodyPr/>
+          <a:lstStyle>
+            <a:lvl1pPr>
+              <a:defRPr sz="1000">
+                <a:solidFill>
+                  <a:srgbClr val="BFBFBF"/>
+                </a:solidFill>
+              </a:defRPr>
+            </a:lvl1pPr>
+          </a:lstStyle>
+          <a:p>
+            <a:pPr algn="r"/>
+            <a:fld id="{F7021451-1387-4CA6-816F-3879F97B5CBC}" type="slidenum">
+              <a:rPr b="0" lang="en-US"/>
+              <a:t>7</a:t>
             </a:fld>
             <a:endParaRPr lang="en-US"/>
           </a:p>

--- a/domain-seminars/week02_revenue_cycle_basics.pptx
+++ b/domain-seminars/week02_revenue_cycle_basics.pptx
@@ -1619,7 +1619,7 @@
                   <a:srgbClr val="FFFFFF"/>
                 </a:solidFill>
               </a:rPr>
-              <a:t>Revenue Cycle Basics</a:t>
+              <a:t>Week 2: Revenue Cycle Basics</a:t>
             </a:r>
             <a:endParaRPr lang="en-US" sz="4000" dirty="0"/>
           </a:p>
